--- a/content/W02/D1/slides/C2_W02_D01_half1_STUDENT.pptx
+++ b/content/W02/D1/slides/C2_W02_D01_half1_STUDENT.pptx
@@ -3497,14 +3497,14 @@
       </p:sp>
       <p:pic>
         <p:nvPicPr>
-          <p:cNvPr id="6" name="Picture 5" descr="a634ddb23722a4c1.png"/>
+          <p:cNvPr id="6" name="Picture 5" descr="cce4a9b0cd7a3821.png"/>
           <p:cNvPicPr>
             <a:picLocks noChangeAspect="1"/>
           </p:cNvPicPr>
           <p:nvPr/>
         </p:nvPicPr>
         <p:blipFill>
-          <a:blip r:embed="rId2"/>
+          <a:blip r:embed="rId3"/>
           <a:stretch>
             <a:fillRect/>
           </a:stretch>
@@ -5744,14 +5744,14 @@
       </p:sp>
       <p:pic>
         <p:nvPicPr>
-          <p:cNvPr id="7" name="Picture 6" descr="6d881fd969ac309c.png"/>
+          <p:cNvPr id="7" name="Picture 6" descr="29a60ab72d3c3faf.png"/>
           <p:cNvPicPr>
             <a:picLocks noChangeAspect="1"/>
           </p:cNvPicPr>
           <p:nvPr/>
         </p:nvPicPr>
         <p:blipFill>
-          <a:blip r:embed="rId2"/>
+          <a:blip r:embed="rId3"/>
           <a:stretch>
             <a:fillRect/>
           </a:stretch>
@@ -8289,14 +8289,14 @@
       </p:sp>
       <p:pic>
         <p:nvPicPr>
-          <p:cNvPr id="6" name="Picture 5" descr="e68eae0fe4afaf7e.png"/>
+          <p:cNvPr id="6" name="Picture 5" descr="9743a26a78d66f86.png"/>
           <p:cNvPicPr>
             <a:picLocks noChangeAspect="1"/>
           </p:cNvPicPr>
           <p:nvPr/>
         </p:nvPicPr>
         <p:blipFill>
-          <a:blip r:embed="rId2"/>
+          <a:blip r:embed="rId3"/>
           <a:stretch>
             <a:fillRect/>
           </a:stretch>
@@ -9628,14 +9628,14 @@
       </p:sp>
       <p:pic>
         <p:nvPicPr>
-          <p:cNvPr id="6" name="Picture 5" descr="d7ff8b52d4b3ce55.png"/>
+          <p:cNvPr id="6" name="Picture 5" descr="8054270cd43413d3.png"/>
           <p:cNvPicPr>
             <a:picLocks noChangeAspect="1"/>
           </p:cNvPicPr>
           <p:nvPr/>
         </p:nvPicPr>
         <p:blipFill>
-          <a:blip r:embed="rId2"/>
+          <a:blip r:embed="rId3"/>
           <a:stretch>
             <a:fillRect/>
           </a:stretch>
@@ -11085,14 +11085,14 @@
       </p:sp>
       <p:pic>
         <p:nvPicPr>
-          <p:cNvPr id="6" name="Picture 5" descr="f584dc03cc8bd911.png"/>
+          <p:cNvPr id="6" name="Picture 5" descr="3cd1e37ed923050f.png"/>
           <p:cNvPicPr>
             <a:picLocks noChangeAspect="1"/>
           </p:cNvPicPr>
           <p:nvPr/>
         </p:nvPicPr>
         <p:blipFill>
-          <a:blip r:embed="rId2"/>
+          <a:blip r:embed="rId3"/>
           <a:stretch>
             <a:fillRect/>
           </a:stretch>
@@ -11659,14 +11659,14 @@
       </p:sp>
       <p:pic>
         <p:nvPicPr>
-          <p:cNvPr id="6" name="Picture 5" descr="ab50bc9ff9616fd6.png"/>
+          <p:cNvPr id="6" name="Picture 5" descr="e8d86d0e98d680c8.png"/>
           <p:cNvPicPr>
             <a:picLocks noChangeAspect="1"/>
           </p:cNvPicPr>
           <p:nvPr/>
         </p:nvPicPr>
         <p:blipFill>
-          <a:blip r:embed="rId2"/>
+          <a:blip r:embed="rId3"/>
           <a:stretch>
             <a:fillRect/>
           </a:stretch>

--- a/content/W02/D1/slides/C2_W02_D01_half1_STUDENT.pptx
+++ b/content/W02/D1/slides/C2_W02_D01_half1_STUDENT.pptx
@@ -1802,7 +1802,7 @@
           </a:p>
           <a:p>
             <a:r>
-              <a:t>Notebook: notebooks/C2_W02_D01_02_segments_STUDENT.ipynb. SQL: sql/C2_W02_D01_03_segments_STUDENT.sql.</a:t>
+              <a:t>Notebook: notebooks/C2_W02_D01_02_segments_STUDENT.ipynb. SQL: sql/C2_W02_D01_02_segments_STUDENT.sql.</a:t>
             </a:r>
           </a:p>
         </p:txBody>
@@ -2727,7 +2727,7 @@
           </a:p>
           <a:p>
             <a:r>
-              <a:t>Notebook: notebooks/C2_W02_D01_03_quarters_STUDENT.ipynb. SQL: sql/C2_W02_D01_04_quarters_STUDENT.sql.</a:t>
+              <a:t>Notebook: notebooks/C2_W02_D01_03_quarters_STUDENT.ipynb. SQL: sql/C2_W02_D01_03_quarters_STUDENT.sql.</a:t>
             </a:r>
           </a:p>
         </p:txBody>

--- a/content/W02/D1/slides/C2_W02_D01_half1_STUDENT.pptx
+++ b/content/W02/D1/slides/C2_W02_D01_half1_STUDENT.pptx
@@ -647,7 +647,7 @@
           </a:p>
           <a:p>
             <a:r>
-              <a:t>Notebook: notebooks/C2_W02_D01_01_warehouse_STUDENT.ipynb. SQL: sql/C2_W02_D01_01_first_queries_STUDENT.sql.</a:t>
+              <a:t>Notebook: notebooks/C2_W02_D01_01_warehouse_STUDENT.ipynb. SQL: sql/C2_W02_D01_01_warehouse_STUDENT.sql.</a:t>
             </a:r>
           </a:p>
         </p:txBody>
@@ -9790,7 +9790,7 @@
                 </a:solidFill>
                 <a:latin typeface="Calibri"/>
               </a:rPr>
-              <a:t>sql/C2_W02_D01_01_first_queries_STUDENT.sql, one block per question.</a:t>
+              <a:t>sql/C2_W02_D01_01_warehouse_STUDENT.sql, one block per question.</a:t>
             </a:r>
           </a:p>
         </p:txBody>

--- a/content/W02/D1/slides/C2_W02_D01_half1_STUDENT.pptx
+++ b/content/W02/D1/slides/C2_W02_D01_half1_STUDENT.pptx
@@ -2279,7 +2279,7 @@
           <a:lstStyle/>
           <a:p>
             <a:r>
-              <a:t>LIVE, 3 minutes. The stats row is the brief. Anand is the CFO of Kalpa Retail; his analyst will</a:t>
+              <a:t>LIVE, 3 minutes. The stats row is the brief. Anand is the finance controller of Kalpa Retail; his analyst will</a:t>
             </a:r>
           </a:p>
           <a:p>
@@ -7542,7 +7542,7 @@
                 </a:solidFill>
                 <a:latin typeface="Calibri"/>
               </a:rPr>
-              <a:t>Anand Iyer, CFO, Kalpa Retail, to the data and AI team at Kalpa's Global Capability Centre</a:t>
+              <a:t>Anand Iyer, finance controller, Kalpa Retail, to the data and AI team at Kalpa's Global Capability Centre</a:t>
             </a:r>
           </a:p>
         </p:txBody>
@@ -8706,7 +8706,7 @@
       </p:sp>
       <p:pic>
         <p:nvPicPr>
-          <p:cNvPr id="9" name="mermaid diagram" descr="5e9d1ecb47b31b1f.png"/>
+          <p:cNvPr id="9" name="mermaid diagram" descr="e7c248840fa66f42.png"/>
           <p:cNvPicPr>
             <a:picLocks noChangeAspect="1"/>
           </p:cNvPicPr>
@@ -12085,7 +12085,7 @@
       </p:sp>
       <p:pic>
         <p:nvPicPr>
-          <p:cNvPr id="9" name="mermaid diagram" descr="a782461c018ec3e6.png"/>
+          <p:cNvPr id="9" name="mermaid diagram" descr="f67cf520115efb24.png"/>
           <p:cNvPicPr>
             <a:picLocks noChangeAspect="1"/>
           </p:cNvPicPr>
@@ -12838,7 +12838,7 @@
       </p:sp>
       <p:pic>
         <p:nvPicPr>
-          <p:cNvPr id="9" name="mermaid diagram" descr="f3cbf4beecfb898f.png"/>
+          <p:cNvPr id="9" name="mermaid diagram" descr="e272f82bf407a28a.png"/>
           <p:cNvPicPr>
             <a:picLocks noChangeAspect="1"/>
           </p:cNvPicPr>
@@ -15008,7 +15008,7 @@
       </p:sp>
       <p:pic>
         <p:nvPicPr>
-          <p:cNvPr id="9" name="mermaid diagram" descr="06b369e26be94eec.png"/>
+          <p:cNvPr id="9" name="mermaid diagram" descr="ca4d9ff7fdbba2e0.png"/>
           <p:cNvPicPr>
             <a:picLocks noChangeAspect="1"/>
           </p:cNvPicPr>
@@ -16959,7 +16959,7 @@
       </p:sp>
       <p:pic>
         <p:nvPicPr>
-          <p:cNvPr id="9" name="mermaid diagram" descr="30c75ebcae7f2f56.png"/>
+          <p:cNvPr id="9" name="mermaid diagram" descr="dfbc2890ccb16d85.png"/>
           <p:cNvPicPr>
             <a:picLocks noChangeAspect="1"/>
           </p:cNvPicPr>
@@ -17740,7 +17740,7 @@
                 </a:solidFill>
                 <a:latin typeface="Calibri"/>
               </a:rPr>
-              <a:t>The CFO wants last week's tree every Monday, from the warehouse, and an analyst who audits every line.</a:t>
+              <a:t>The finance controller wants last week's tree every Monday, from the warehouse, and an analyst who audits every line.</a:t>
             </a:r>
           </a:p>
         </p:txBody>
@@ -18278,7 +18278,7 @@
       </p:sp>
       <p:pic>
         <p:nvPicPr>
-          <p:cNvPr id="9" name="mermaid diagram" descr="77f46e32dac38567.png"/>
+          <p:cNvPr id="9" name="mermaid diagram" descr="6a7c30b4937cbfbe.png"/>
           <p:cNvPicPr>
             <a:picLocks noChangeAspect="1"/>
           </p:cNvPicPr>
@@ -20262,7 +20262,7 @@
       </p:graphicFrame>
       <p:pic>
         <p:nvPicPr>
-          <p:cNvPr id="10" name="mermaid diagram" descr="93ad4fa194c1b7da.png"/>
+          <p:cNvPr id="10" name="mermaid diagram" descr="6a39d33904fb82bc.png"/>
           <p:cNvPicPr>
             <a:picLocks noChangeAspect="1"/>
           </p:cNvPicPr>
@@ -21948,7 +21948,7 @@
       </p:sp>
       <p:pic>
         <p:nvPicPr>
-          <p:cNvPr id="9" name="mermaid diagram" descr="6d288b596ca0b339.png"/>
+          <p:cNvPr id="9" name="mermaid diagram" descr="82c63a5263e0ed74.png"/>
           <p:cNvPicPr>
             <a:picLocks noChangeAspect="1"/>
           </p:cNvPicPr>
@@ -22701,7 +22701,7 @@
       </p:sp>
       <p:pic>
         <p:nvPicPr>
-          <p:cNvPr id="9" name="mermaid diagram" descr="a2110e9e7deb753a.png"/>
+          <p:cNvPr id="9" name="mermaid diagram" descr="d8aaba855403f768.png"/>
           <p:cNvPicPr>
             <a:picLocks noChangeAspect="1"/>
           </p:cNvPicPr>
@@ -24265,7 +24265,7 @@
       </p:sp>
       <p:pic>
         <p:nvPicPr>
-          <p:cNvPr id="9" name="mermaid diagram" descr="096ef5ab22fa8367.png"/>
+          <p:cNvPr id="9" name="mermaid diagram" descr="5b85e490a82d7692.png"/>
           <p:cNvPicPr>
             <a:picLocks noChangeAspect="1"/>
           </p:cNvPicPr>
@@ -25349,7 +25349,7 @@
       </p:sp>
       <p:pic>
         <p:nvPicPr>
-          <p:cNvPr id="14" name="mermaid diagram" descr="b74f5781e730b113.png"/>
+          <p:cNvPr id="14" name="mermaid diagram" descr="29a32aba4ab76b8f.png"/>
           <p:cNvPicPr>
             <a:picLocks noChangeAspect="1"/>
           </p:cNvPicPr>
@@ -29169,7 +29169,7 @@
       </p:sp>
       <p:pic>
         <p:nvPicPr>
-          <p:cNvPr id="9" name="mermaid diagram" descr="776de219dc4df376.png"/>
+          <p:cNvPr id="9" name="mermaid diagram" descr="1db3360a4e13015a.png"/>
           <p:cNvPicPr>
             <a:picLocks noChangeAspect="1"/>
           </p:cNvPicPr>
@@ -31137,7 +31137,7 @@
       </p:sp>
       <p:pic>
         <p:nvPicPr>
-          <p:cNvPr id="9" name="mermaid diagram" descr="9b66a5e9566aa2ff.png"/>
+          <p:cNvPr id="9" name="mermaid diagram" descr="3f7a11a5bfa1a2d8.png"/>
           <p:cNvPicPr>
             <a:picLocks noChangeAspect="1"/>
           </p:cNvPicPr>
@@ -31787,7 +31787,7 @@
       </p:sp>
       <p:pic>
         <p:nvPicPr>
-          <p:cNvPr id="9" name="mermaid diagram" descr="bab6c3304ce5a213.png"/>
+          <p:cNvPr id="9" name="mermaid diagram" descr="cfd59792554dbf7a.png"/>
           <p:cNvPicPr>
             <a:picLocks noChangeAspect="1"/>
           </p:cNvPicPr>
@@ -33636,7 +33636,7 @@
       </p:sp>
       <p:pic>
         <p:nvPicPr>
-          <p:cNvPr id="9" name="mermaid diagram" descr="99f9ea1747753ad0.png"/>
+          <p:cNvPr id="9" name="mermaid diagram" descr="2818a7dafb2e0f8d.png"/>
           <p:cNvPicPr>
             <a:picLocks noChangeAspect="1"/>
           </p:cNvPicPr>
@@ -35200,7 +35200,7 @@
       </p:sp>
       <p:pic>
         <p:nvPicPr>
-          <p:cNvPr id="9" name="mermaid diagram" descr="230c8d2ddee8bc43.png"/>
+          <p:cNvPr id="9" name="mermaid diagram" descr="a57db559aeeceb75.png"/>
           <p:cNvPicPr>
             <a:picLocks noChangeAspect="1"/>
           </p:cNvPicPr>
@@ -36013,7 +36013,7 @@
       </p:sp>
       <p:pic>
         <p:nvPicPr>
-          <p:cNvPr id="9" name="mermaid diagram" descr="fef96764c24f63c4.png"/>
+          <p:cNvPr id="9" name="mermaid diagram" descr="0e5464ea88ae9e98.png"/>
           <p:cNvPicPr>
             <a:picLocks noChangeAspect="1"/>
           </p:cNvPicPr>
@@ -38922,7 +38922,7 @@
       </p:sp>
       <p:pic>
         <p:nvPicPr>
-          <p:cNvPr id="9" name="mermaid diagram" descr="49cc1c6876eb26ca.png"/>
+          <p:cNvPr id="9" name="mermaid diagram" descr="d30e79d1fd0c5839.png"/>
           <p:cNvPicPr>
             <a:picLocks noChangeAspect="1"/>
           </p:cNvPicPr>
@@ -42663,7 +42663,7 @@
       </p:sp>
       <p:pic>
         <p:nvPicPr>
-          <p:cNvPr id="9" name="mermaid diagram" descr="85613595a8e7c451.png"/>
+          <p:cNvPr id="9" name="mermaid diagram" descr="eec574208616d404.png"/>
           <p:cNvPicPr>
             <a:picLocks noChangeAspect="1"/>
           </p:cNvPicPr>
@@ -43313,7 +43313,7 @@
       </p:sp>
       <p:pic>
         <p:nvPicPr>
-          <p:cNvPr id="9" name="mermaid diagram" descr="a1956adad251ade1.png"/>
+          <p:cNvPr id="9" name="mermaid diagram" descr="86a21c4df1fea7eb.png"/>
           <p:cNvPicPr>
             <a:picLocks noChangeAspect="1"/>
           </p:cNvPicPr>
@@ -45384,7 +45384,7 @@
       </p:sp>
       <p:pic>
         <p:nvPicPr>
-          <p:cNvPr id="9" name="mermaid diagram" descr="446f523db9d29fe4.png"/>
+          <p:cNvPr id="9" name="mermaid diagram" descr="ea01e4a5615f05d1.png"/>
           <p:cNvPicPr>
             <a:picLocks noChangeAspect="1"/>
           </p:cNvPicPr>
@@ -46382,7 +46382,7 @@
       </p:sp>
       <p:pic>
         <p:nvPicPr>
-          <p:cNvPr id="9" name="mermaid diagram" descr="c25ba27c6ab31169.png"/>
+          <p:cNvPr id="9" name="mermaid diagram" descr="8802efd238fb2702.png"/>
           <p:cNvPicPr>
             <a:picLocks noChangeAspect="1"/>
           </p:cNvPicPr>
@@ -48285,7 +48285,7 @@
       </p:sp>
       <p:pic>
         <p:nvPicPr>
-          <p:cNvPr id="9" name="mermaid diagram" descr="3768ea64a5341b91.png"/>
+          <p:cNvPr id="9" name="mermaid diagram" descr="2b96b1f67cbf317d.png"/>
           <p:cNvPicPr>
             <a:picLocks noChangeAspect="1"/>
           </p:cNvPicPr>
@@ -48940,7 +48940,7 @@
       </p:sp>
       <p:pic>
         <p:nvPicPr>
-          <p:cNvPr id="9" name="mermaid diagram" descr="882d21cbe8d7fe3b.png"/>
+          <p:cNvPr id="9" name="mermaid diagram" descr="3024a9241b3fa06f.png"/>
           <p:cNvPicPr>
             <a:picLocks noChangeAspect="1"/>
           </p:cNvPicPr>
